--- a/dist/초3/수학/도형과측정/초3_수학_도형과측정_04_mm와km_학생용.pptx
+++ b/dist/초3/수학/도형과측정/초3_수학_도형과측정_04_mm와km_학생용.pptx
@@ -121,13 +121,13 @@
   <p:extLst>
     <p:ext uri="{521415D9-36F7-43E2-AB2F-B90AF26B5E84}">
       <p14:sectionLst xmlns:p14="http://schemas.microsoft.com/office/powerpoint/2010/main">
-        <p14:section name="도입" id="{6d848017-a6cd-dc14-4e0c-26c31d0ebddf}">
+        <p14:section name="도입" id="{602fa182-d5f7-8614-1fe1-cac45ee77cfb}">
           <p14:sldIdLst>
             <p14:sldId id="256"/>
             <p14:sldId id="257"/>
           </p14:sldIdLst>
         </p14:section>
-        <p14:section name="개념" id="{67b0b472-d5ea-23fd-ab8c-3cf034506af1}">
+        <p14:section name="개념" id="{370ade0b-503e-3023-9fc0-de6da0538224}">
           <p14:sldIdLst>
             <p14:sldId id="258"/>
             <p14:sldId id="259"/>
@@ -135,7 +135,7 @@
             <p14:sldId id="264"/>
           </p14:sldIdLst>
         </p14:section>
-        <p14:section name="연습" id="{dffe8afe-5e83-2e50-d139-ce3c4046cf20}">
+        <p14:section name="연습" id="{44a7903f-9cb9-b1a6-19b5-9cf2593b9b41}">
           <p14:sldIdLst>
             <p14:sldId id="260"/>
             <p14:sldId id="261"/>
@@ -144,24 +144,24 @@
             <p14:sldId id="266"/>
           </p14:sldIdLst>
         </p14:section>
-        <p14:section name="개념" id="{4d0ed858-7a51-5ea6-bdb7-6b6e8cd53aed}">
+        <p14:section name="개념" id="{bf24d30f-10e8-5239-c62a-c5f704a88457}">
           <p14:sldIdLst/>
         </p14:section>
-        <p14:section name="연습" id="{a873af59-f2bc-ba0c-b2d6-80e992e064ca}">
+        <p14:section name="연습" id="{56bdcb41-502b-a57a-5d44-75c10a29faec}">
           <p14:sldIdLst/>
         </p14:section>
-        <p14:section name="확인" id="{eb4af97e-a2d0-0e74-6c56-ed0eb527c974}">
+        <p14:section name="확인" id="{cebc482f-9b00-3963-142b-f78f794d5b67}">
           <p14:sldIdLst>
             <p14:sldId id="267"/>
             <p14:sldId id="268"/>
           </p14:sldIdLst>
         </p14:section>
-        <p14:section name="정리" id="{e435ca90-dda1-cf52-614a-bd292c936605}">
+        <p14:section name="정리" id="{c6624298-f52b-d5c3-2341-1f1cc08eb0e7}">
           <p14:sldIdLst>
             <p14:sldId id="269"/>
           </p14:sldIdLst>
         </p14:section>
-        <p14:section name="보충" id="{c2aefa3b-a8dd-c954-c5ea-ea7271caa992}">
+        <p14:section name="보충" id="{54fd15b6-d50e-86b6-1c30-d17503d3a236}">
           <p14:sldIdLst>
             <p14:sldId id="270"/>
           </p14:sldIdLst>
